--- a/docs/Ryse Presentation v3.pptx
+++ b/docs/Ryse Presentation v3.pptx
@@ -1175,7 +1175,7 @@
           <a:lstStyle/>
           <a:p>
             <a:r>
-              <a:t>Two honest readings. First, "complete" means the category is built and running, not that every bond in it has our number — 183 do not, and every one of them is named in a register with its reason. Second, the largest remaining block is the mortgage book, and its engine is already built and tested; what it needs is terms data, not development.</a:t>
+              <a:t>Two honest readings. First, "complete" means the category is built and running, not that every bond in it has our number — 183 do not, and every one of them is named in a register with its reason. That is not an apology: a real book has incomplete records, and a tool meant for any portfolio has to name what it cannot price rather than guess at it. Second, the largest remaining block is the mortgage book, and its engine is already built and tested; what it needs is terms data, not development.</a:t>
             </a:r>
           </a:p>
         </p:txBody>
@@ -1245,7 +1245,7 @@
           <a:lstStyle/>
           <a:p>
             <a:r>
-              <a:t>Two columns because the holdings file's Summary sheet counts lines and we count securities, and the two differ: a bond held by two managers appears on two lines. Lines reconcile against their sheet exactly — 2,366 — and securities are what a pricing question is actually about.</a:t>
+              <a:t>Two columns because the client's own Summary sheet counts lines and we count securities, and the two differ: a bond held by two managers appears on two lines. Lines reconcile against their sheet exactly — 2,366 — and securities are what a pricing question is actually about.</a:t>
             </a:r>
           </a:p>
         </p:txBody>
@@ -1315,7 +1315,7 @@
           <a:lstStyle/>
           <a:p>
             <a:r>
-              <a:t>None of these three uses anything we control — that is the point, we are not grading our own homework. The third one also found something nobody knew: those records are struck one day after the valuation date. Small, and it had been invisible for months. If anyone asks for the populations: the zero test is over bonds priced on their own government's curve — eleven Japanese, twelve UK with the under-one-year bonds excluded, the same rule every median in this project uses. The duration comparison is the five agency bonds that carry an early-repayment right, which are the only ones where the custodian's number and ours are measuring the same thing.</a:t>
+              <a:t>None of these three uses anything we control — that is the point, we are not grading our own homework, and the last two are checked against a live institutional portfolio's own records rather than a test file. The third one also found something nobody knew: those records are struck one day after the valuation date. Small, and it had been invisible for months. If anyone asks for the populations: the zero test is over bonds priced on their own government's curve — eleven Japanese, twelve UK with the under-one-year bonds excluded, the same rule every median in this project uses. The duration comparison is the five agency bonds that carry an early-repayment right, which are the only ones where the custodian's number and ours are measuring the same thing.</a:t>
             </a:r>
           </a:p>
         </p:txBody>
@@ -5248,7 +5248,7 @@
                   <a:srgbClr val="262626"/>
                 </a:solidFill>
               </a:rPr>
-              <a:t>•  We work on a representative </a:t>
+              <a:t>•  We build and check against </a:t>
             </a:r>
             <a:r>
               <a:rPr sz="1300" b="1">
@@ -5256,7 +5256,7 @@
                   <a:srgbClr val="262626"/>
                 </a:solidFill>
               </a:rPr>
-              <a:t>March 2009</a:t>
+              <a:t>a real client portfolio</a:t>
             </a:r>
             <a:r>
               <a:rPr sz="1300" b="0">
@@ -5264,7 +5264,7 @@
                   <a:srgbClr val="262626"/>
                 </a:solidFill>
               </a:rPr>
-              <a:t> portfolio — chosen as the reference case because the outcomes are already known</a:t>
+              <a:t> — a pension fund's fixed-income book at March 2009, chosen as the reference case because its outcomes are already known</a:t>
             </a:r>
           </a:p>
         </p:txBody>
@@ -5415,7 +5415,7 @@
                   <a:srgbClr val="262626"/>
                 </a:solidFill>
               </a:rPr>
-              <a:t>; the remaining 183 are individually named, most of them bonds whose terms are not in the file at all</a:t>
+              <a:t>; the remaining 183 are individually named, most of them bonds whose terms are absent from the source records themselves</a:t>
             </a:r>
           </a:p>
         </p:txBody>
@@ -6997,7 +6997,7 @@
                   <a:srgbClr val="262626"/>
                 </a:solidFill>
               </a:rPr>
-              <a:t>The portfolio's custodian independently reports a risk number for some bonds.</a:t>
+              <a:t>The client's own custodian independently reports a risk number for some bonds.</a:t>
             </a:r>
             <a:r>
               <a:rPr sz="1300" b="0">
@@ -7028,7 +7028,7 @@
                   <a:srgbClr val="262626"/>
                 </a:solidFill>
               </a:rPr>
-              <a:t>We re-derived the portfolio's own inflation adjustments from published government statistics</a:t>
+              <a:t>We re-derived the client's own inflation adjustments from published government statistics</a:t>
             </a:r>
             <a:r>
               <a:rPr sz="1300" b="0">

--- a/docs/Ryse Presentation v3.pptx
+++ b/docs/Ryse Presentation v3.pptx
@@ -1035,7 +1035,7 @@
           <a:lstStyle/>
           <a:p>
             <a:r>
-              <a:t>The forty seconds is the number that makes the goal arithmetic rather than aspirational. A thousand scenarios is a thousand times forty seconds divided by however many machines you run it on — that is a capacity question, and capacity is something you can buy. It was not a capacity question before.</a:t>
+              <a:t>The forty seconds is the number that makes the goal arithmetic rather than aspirational. A thousand scenarios is a thousand times forty seconds divided by however many machines you run it on — that is a capacity question, and capacity is something you can buy. It was not a capacity question before. If an engineer asks how it runs there: today it is a checkout in an Azure terminal, which proves the code is portable and fast. Making it a service other systems call is the next step and is on slide 9 — do not let "runs on Azure" be heard as "deployed as a service", because it is not one yet.</a:t>
             </a:r>
           </a:p>
         </p:txBody>
@@ -1385,7 +1385,7 @@
           <a:lstStyle/>
           <a:p>
             <a:r>
-              <a:t>Be straight that the pooled classes are genuine remaining engineering, not a data problem. What makes them tractable is that the hard parts — the cash-flow machinery, the option model, the market-data plumbing — are built and proven on the 766 we already price.</a:t>
+              <a:t>Be straight that the pooled classes are genuine remaining engineering, not a data problem. On the cloud step: today each of us runs the code in our own Azure terminal, which was the point of the trial in September. Hosting it so Excel or another system can call it over the network is a separate, known piece of work — we put it to Mario in that report as an explicit question and it is still open. What makes them tractable is that the hard parts — the cash-flow machinery, the option model, the market-data plumbing — are built and proven on the 766 we already price.</a:t>
             </a:r>
           </a:p>
         </p:txBody>
@@ -5046,7 +5046,7 @@
                   <a:srgbClr val="262626"/>
                 </a:solidFill>
               </a:rPr>
-              <a:t>The whole book revalues end to end on Azure in 40 seconds</a:t>
+              <a:t>The code runs unchanged on Azure</a:t>
             </a:r>
             <a:r>
               <a:rPr sz="1300" b="0">
@@ -5054,7 +5054,7 @@
                   <a:srgbClr val="262626"/>
                 </a:solidFill>
               </a:rPr>
-              <a:t> — measured, on the free tier</a:t>
+              <a:t> — a clean checkout revalues the whole book in 40 seconds, measured, on the free tier</a:t>
             </a:r>
           </a:p>
           <a:p>
@@ -7200,7 +7200,7 @@
                   <a:srgbClr val="262626"/>
                 </a:solidFill>
               </a:rPr>
-              <a:t>Parallel execution on cloud with Ryse's engineer</a:t>
+              <a:t>Running it as a hosted service, then in parallel</a:t>
             </a:r>
             <a:r>
               <a:rPr sz="1300" b="0">
@@ -7208,7 +7208,7 @@
                   <a:srgbClr val="262626"/>
                 </a:solidFill>
               </a:rPr>
-              <a:t> — the step that turns forty seconds a scenario into a thousand scenarios</a:t>
+              <a:t> — with Ryse's engineer. The interface is already one request in, one answer out, and exactly one file knows about its environment, so this is defined work rather than a rewrite. It is the step that turns forty seconds into a thousand scenarios</a:t>
             </a:r>
           </a:p>
           <a:p>
